--- a/curriculum/M01/W05/L03/slides-2.pptx
+++ b/curriculum/M01/W05/L03/slides-2.pptx
@@ -15532,7 +15532,7 @@
                 <a:ea typeface="Malgun Gothic"/>
                 <a:cs typeface="Malgun Gothic"/>
               </a:rPr>
-              <a:t>M01-W05-L03 생체에너지: 자유에너지와 ATP — 효소의 촉매 작용, ATP와 GTP의 가수분해</a:t>
+              <a:t>M01-W09-L02 생체에너지: 자유에너지와 ATP — 효소의 촉매 작용, ATP와 GTP의 가수분해</a:t>
             </a:r>
           </a:p>
         </p:txBody>
